--- a/ゲーム科2年/00_前期/ゲーム開発Ⅰ/11_デバッグカメラ課題.pptx
+++ b/ゲーム科2年/00_前期/ゲーム開発Ⅰ/11_デバッグカメラ課題.pptx
@@ -261,7 +261,7 @@
           <a:p>
             <a:fld id="{E9CC885B-4903-4D54-9A93-00025F12DED9}" type="datetimeFigureOut">
               <a:rPr kumimoji="1" lang="ja-JP" altLang="en-US" smtClean="0"/>
-              <a:t>2024/10/17</a:t>
+              <a:t>2025/1/6</a:t>
             </a:fld>
             <a:endParaRPr kumimoji="1" lang="ja-JP" altLang="en-US"/>
           </a:p>
@@ -491,7 +491,7 @@
           <a:p>
             <a:fld id="{E9CC885B-4903-4D54-9A93-00025F12DED9}" type="datetimeFigureOut">
               <a:rPr kumimoji="1" lang="ja-JP" altLang="en-US" smtClean="0"/>
-              <a:t>2024/10/17</a:t>
+              <a:t>2025/1/6</a:t>
             </a:fld>
             <a:endParaRPr kumimoji="1" lang="ja-JP" altLang="en-US"/>
           </a:p>
@@ -731,7 +731,7 @@
           <a:p>
             <a:fld id="{E9CC885B-4903-4D54-9A93-00025F12DED9}" type="datetimeFigureOut">
               <a:rPr kumimoji="1" lang="ja-JP" altLang="en-US" smtClean="0"/>
-              <a:t>2024/10/17</a:t>
+              <a:t>2025/1/6</a:t>
             </a:fld>
             <a:endParaRPr kumimoji="1" lang="ja-JP" altLang="en-US"/>
           </a:p>
@@ -961,7 +961,7 @@
           <a:p>
             <a:fld id="{E9CC885B-4903-4D54-9A93-00025F12DED9}" type="datetimeFigureOut">
               <a:rPr kumimoji="1" lang="ja-JP" altLang="en-US" smtClean="0"/>
-              <a:t>2024/10/17</a:t>
+              <a:t>2025/1/6</a:t>
             </a:fld>
             <a:endParaRPr kumimoji="1" lang="ja-JP" altLang="en-US"/>
           </a:p>
@@ -1236,7 +1236,7 @@
           <a:p>
             <a:fld id="{E9CC885B-4903-4D54-9A93-00025F12DED9}" type="datetimeFigureOut">
               <a:rPr kumimoji="1" lang="ja-JP" altLang="en-US" smtClean="0"/>
-              <a:t>2024/10/17</a:t>
+              <a:t>2025/1/6</a:t>
             </a:fld>
             <a:endParaRPr kumimoji="1" lang="ja-JP" altLang="en-US"/>
           </a:p>
@@ -1565,7 +1565,7 @@
           <a:p>
             <a:fld id="{E9CC885B-4903-4D54-9A93-00025F12DED9}" type="datetimeFigureOut">
               <a:rPr kumimoji="1" lang="ja-JP" altLang="en-US" smtClean="0"/>
-              <a:t>2024/10/17</a:t>
+              <a:t>2025/1/6</a:t>
             </a:fld>
             <a:endParaRPr kumimoji="1" lang="ja-JP" altLang="en-US"/>
           </a:p>
@@ -2041,7 +2041,7 @@
           <a:p>
             <a:fld id="{E9CC885B-4903-4D54-9A93-00025F12DED9}" type="datetimeFigureOut">
               <a:rPr kumimoji="1" lang="ja-JP" altLang="en-US" smtClean="0"/>
-              <a:t>2024/10/17</a:t>
+              <a:t>2025/1/6</a:t>
             </a:fld>
             <a:endParaRPr kumimoji="1" lang="ja-JP" altLang="en-US"/>
           </a:p>
@@ -2182,7 +2182,7 @@
           <a:p>
             <a:fld id="{E9CC885B-4903-4D54-9A93-00025F12DED9}" type="datetimeFigureOut">
               <a:rPr kumimoji="1" lang="ja-JP" altLang="en-US" smtClean="0"/>
-              <a:t>2024/10/17</a:t>
+              <a:t>2025/1/6</a:t>
             </a:fld>
             <a:endParaRPr kumimoji="1" lang="ja-JP" altLang="en-US"/>
           </a:p>
@@ -2295,7 +2295,7 @@
           <a:p>
             <a:fld id="{E9CC885B-4903-4D54-9A93-00025F12DED9}" type="datetimeFigureOut">
               <a:rPr kumimoji="1" lang="ja-JP" altLang="en-US" smtClean="0"/>
-              <a:t>2024/10/17</a:t>
+              <a:t>2025/1/6</a:t>
             </a:fld>
             <a:endParaRPr kumimoji="1" lang="ja-JP" altLang="en-US"/>
           </a:p>
@@ -2638,7 +2638,7 @@
           <a:p>
             <a:fld id="{E9CC885B-4903-4D54-9A93-00025F12DED9}" type="datetimeFigureOut">
               <a:rPr kumimoji="1" lang="ja-JP" altLang="en-US" smtClean="0"/>
-              <a:t>2024/10/17</a:t>
+              <a:t>2025/1/6</a:t>
             </a:fld>
             <a:endParaRPr kumimoji="1" lang="ja-JP" altLang="en-US"/>
           </a:p>
@@ -2926,7 +2926,7 @@
           <a:p>
             <a:fld id="{E9CC885B-4903-4D54-9A93-00025F12DED9}" type="datetimeFigureOut">
               <a:rPr kumimoji="1" lang="ja-JP" altLang="en-US" smtClean="0"/>
-              <a:t>2024/10/17</a:t>
+              <a:t>2025/1/6</a:t>
             </a:fld>
             <a:endParaRPr kumimoji="1" lang="ja-JP" altLang="en-US"/>
           </a:p>
@@ -3199,7 +3199,7 @@
           <a:p>
             <a:fld id="{E9CC885B-4903-4D54-9A93-00025F12DED9}" type="datetimeFigureOut">
               <a:rPr kumimoji="1" lang="ja-JP" altLang="en-US" smtClean="0"/>
-              <a:t>2024/10/17</a:t>
+              <a:t>2025/1/6</a:t>
             </a:fld>
             <a:endParaRPr kumimoji="1" lang="ja-JP" altLang="en-US"/>
           </a:p>
@@ -4142,12 +4142,24 @@
               <a:t>新たに</a:t>
             </a:r>
             <a:r>
-              <a:rPr lang="en-US" altLang="ja-JP" sz="2400" dirty="0" err="1"/>
+              <a:rPr lang="en-US" altLang="ja-JP" sz="2400" b="1" dirty="0" err="1">
+                <a:solidFill>
+                  <a:srgbClr val="00B050"/>
+                </a:solidFill>
+              </a:rPr>
               <a:t>DebugCamera</a:t>
             </a:r>
             <a:r>
+              <a:rPr lang="ja-JP" altLang="en-US" sz="2400" b="1" dirty="0">
+                <a:solidFill>
+                  <a:srgbClr val="00B050"/>
+                </a:solidFill>
+              </a:rPr>
+              <a:t>クラス</a:t>
+            </a:r>
+            <a:r>
               <a:rPr lang="ja-JP" altLang="en-US" sz="2400" dirty="0"/>
-              <a:t>クラスを作ったほうが良いと思います。</a:t>
+              <a:t>を作ったほうが良いと思います。</a:t>
             </a:r>
             <a:endParaRPr lang="en-US" altLang="ja-JP" sz="2400" dirty="0"/>
           </a:p>
@@ -4157,15 +4169,31 @@
               <a:t>現状の</a:t>
             </a:r>
             <a:r>
-              <a:rPr lang="en-US" altLang="ja-JP" sz="2400" dirty="0"/>
+              <a:rPr lang="en-US" altLang="ja-JP" sz="2400" b="1" dirty="0">
+                <a:solidFill>
+                  <a:srgbClr val="00B050"/>
+                </a:solidFill>
+              </a:rPr>
               <a:t>Camera</a:t>
             </a:r>
             <a:r>
+              <a:rPr lang="ja-JP" altLang="en-US" sz="2400" b="1" dirty="0">
+                <a:solidFill>
+                  <a:srgbClr val="00B050"/>
+                </a:solidFill>
+              </a:rPr>
+              <a:t>クラス</a:t>
+            </a:r>
+            <a:r>
               <a:rPr lang="ja-JP" altLang="en-US" sz="2400" dirty="0"/>
-              <a:t>クラスを参考に</a:t>
-            </a:r>
-            <a:r>
-              <a:rPr lang="en-US" altLang="ja-JP" sz="2400" dirty="0" err="1"/>
+              <a:t>を参考に</a:t>
+            </a:r>
+            <a:r>
+              <a:rPr lang="en-US" altLang="ja-JP" sz="2400" b="1" dirty="0" err="1">
+                <a:solidFill>
+                  <a:srgbClr val="00B050"/>
+                </a:solidFill>
+              </a:rPr>
               <a:t>CameraManager</a:t>
             </a:r>
             <a:r>
@@ -4180,23 +4208,31 @@
               <a:t>現状の</a:t>
             </a:r>
             <a:r>
-              <a:rPr lang="en-US" altLang="ja-JP" sz="2400" dirty="0"/>
+              <a:rPr lang="en-US" altLang="ja-JP" sz="2400" b="1" dirty="0">
+                <a:solidFill>
+                  <a:srgbClr val="00B050"/>
+                </a:solidFill>
+              </a:rPr>
               <a:t>Camera</a:t>
             </a:r>
             <a:r>
+              <a:rPr lang="ja-JP" altLang="en-US" sz="2400" b="1" dirty="0">
+                <a:solidFill>
+                  <a:srgbClr val="00B050"/>
+                </a:solidFill>
+              </a:rPr>
+              <a:t>クラス</a:t>
+            </a:r>
+            <a:r>
               <a:rPr lang="ja-JP" altLang="en-US" sz="2400" dirty="0"/>
-              <a:t>クラスの処理が結構使いまわせるので、</a:t>
+              <a:t>の処理が結構使いまわせるので、</a:t>
             </a:r>
             <a:endParaRPr lang="en-US" altLang="ja-JP" sz="2400" dirty="0"/>
           </a:p>
           <a:p>
             <a:r>
-              <a:rPr lang="ja-JP" altLang="en-US" sz="2400"/>
-              <a:t>必要</a:t>
-            </a:r>
-            <a:r>
               <a:rPr lang="ja-JP" altLang="en-US" sz="2400" dirty="0"/>
-              <a:t>な個所はコピーしましょう。</a:t>
+              <a:t>必要な個所はコピーしましょう。</a:t>
             </a:r>
             <a:endParaRPr lang="en-US" altLang="ja-JP" sz="2400" dirty="0"/>
           </a:p>
@@ -4221,7 +4257,15 @@
           <a:p>
             <a:r>
               <a:rPr lang="ja-JP" altLang="en-US" sz="2400" dirty="0"/>
-              <a:t>ほしい変数を持っているクラスに、値を取得する関数を作りましょう。</a:t>
+              <a:t>ほしい変数を持っているクラスに、値を</a:t>
+            </a:r>
+            <a:r>
+              <a:rPr lang="ja-JP" altLang="en-US" sz="2400"/>
+              <a:t>取得すｆる</a:t>
+            </a:r>
+            <a:r>
+              <a:rPr lang="ja-JP" altLang="en-US" sz="2400" dirty="0"/>
+              <a:t>関数を作りましょう。</a:t>
             </a:r>
             <a:endParaRPr lang="en-US" altLang="ja-JP" sz="2400" dirty="0"/>
           </a:p>

--- a/ゲーム科2年/00_前期/ゲーム開発Ⅰ/11_デバッグカメラ課題.pptx
+++ b/ゲーム科2年/00_前期/ゲーム開発Ⅰ/11_デバッグカメラ課題.pptx
@@ -261,7 +261,7 @@
           <a:p>
             <a:fld id="{E9CC885B-4903-4D54-9A93-00025F12DED9}" type="datetimeFigureOut">
               <a:rPr kumimoji="1" lang="ja-JP" altLang="en-US" smtClean="0"/>
-              <a:t>2025/1/6</a:t>
+              <a:t>2025/2/7</a:t>
             </a:fld>
             <a:endParaRPr kumimoji="1" lang="ja-JP" altLang="en-US"/>
           </a:p>
@@ -491,7 +491,7 @@
           <a:p>
             <a:fld id="{E9CC885B-4903-4D54-9A93-00025F12DED9}" type="datetimeFigureOut">
               <a:rPr kumimoji="1" lang="ja-JP" altLang="en-US" smtClean="0"/>
-              <a:t>2025/1/6</a:t>
+              <a:t>2025/2/7</a:t>
             </a:fld>
             <a:endParaRPr kumimoji="1" lang="ja-JP" altLang="en-US"/>
           </a:p>
@@ -731,7 +731,7 @@
           <a:p>
             <a:fld id="{E9CC885B-4903-4D54-9A93-00025F12DED9}" type="datetimeFigureOut">
               <a:rPr kumimoji="1" lang="ja-JP" altLang="en-US" smtClean="0"/>
-              <a:t>2025/1/6</a:t>
+              <a:t>2025/2/7</a:t>
             </a:fld>
             <a:endParaRPr kumimoji="1" lang="ja-JP" altLang="en-US"/>
           </a:p>
@@ -961,7 +961,7 @@
           <a:p>
             <a:fld id="{E9CC885B-4903-4D54-9A93-00025F12DED9}" type="datetimeFigureOut">
               <a:rPr kumimoji="1" lang="ja-JP" altLang="en-US" smtClean="0"/>
-              <a:t>2025/1/6</a:t>
+              <a:t>2025/2/7</a:t>
             </a:fld>
             <a:endParaRPr kumimoji="1" lang="ja-JP" altLang="en-US"/>
           </a:p>
@@ -1236,7 +1236,7 @@
           <a:p>
             <a:fld id="{E9CC885B-4903-4D54-9A93-00025F12DED9}" type="datetimeFigureOut">
               <a:rPr kumimoji="1" lang="ja-JP" altLang="en-US" smtClean="0"/>
-              <a:t>2025/1/6</a:t>
+              <a:t>2025/2/7</a:t>
             </a:fld>
             <a:endParaRPr kumimoji="1" lang="ja-JP" altLang="en-US"/>
           </a:p>
@@ -1565,7 +1565,7 @@
           <a:p>
             <a:fld id="{E9CC885B-4903-4D54-9A93-00025F12DED9}" type="datetimeFigureOut">
               <a:rPr kumimoji="1" lang="ja-JP" altLang="en-US" smtClean="0"/>
-              <a:t>2025/1/6</a:t>
+              <a:t>2025/2/7</a:t>
             </a:fld>
             <a:endParaRPr kumimoji="1" lang="ja-JP" altLang="en-US"/>
           </a:p>
@@ -2041,7 +2041,7 @@
           <a:p>
             <a:fld id="{E9CC885B-4903-4D54-9A93-00025F12DED9}" type="datetimeFigureOut">
               <a:rPr kumimoji="1" lang="ja-JP" altLang="en-US" smtClean="0"/>
-              <a:t>2025/1/6</a:t>
+              <a:t>2025/2/7</a:t>
             </a:fld>
             <a:endParaRPr kumimoji="1" lang="ja-JP" altLang="en-US"/>
           </a:p>
@@ -2182,7 +2182,7 @@
           <a:p>
             <a:fld id="{E9CC885B-4903-4D54-9A93-00025F12DED9}" type="datetimeFigureOut">
               <a:rPr kumimoji="1" lang="ja-JP" altLang="en-US" smtClean="0"/>
-              <a:t>2025/1/6</a:t>
+              <a:t>2025/2/7</a:t>
             </a:fld>
             <a:endParaRPr kumimoji="1" lang="ja-JP" altLang="en-US"/>
           </a:p>
@@ -2295,7 +2295,7 @@
           <a:p>
             <a:fld id="{E9CC885B-4903-4D54-9A93-00025F12DED9}" type="datetimeFigureOut">
               <a:rPr kumimoji="1" lang="ja-JP" altLang="en-US" smtClean="0"/>
-              <a:t>2025/1/6</a:t>
+              <a:t>2025/2/7</a:t>
             </a:fld>
             <a:endParaRPr kumimoji="1" lang="ja-JP" altLang="en-US"/>
           </a:p>
@@ -2638,7 +2638,7 @@
           <a:p>
             <a:fld id="{E9CC885B-4903-4D54-9A93-00025F12DED9}" type="datetimeFigureOut">
               <a:rPr kumimoji="1" lang="ja-JP" altLang="en-US" smtClean="0"/>
-              <a:t>2025/1/6</a:t>
+              <a:t>2025/2/7</a:t>
             </a:fld>
             <a:endParaRPr kumimoji="1" lang="ja-JP" altLang="en-US"/>
           </a:p>
@@ -2926,7 +2926,7 @@
           <a:p>
             <a:fld id="{E9CC885B-4903-4D54-9A93-00025F12DED9}" type="datetimeFigureOut">
               <a:rPr kumimoji="1" lang="ja-JP" altLang="en-US" smtClean="0"/>
-              <a:t>2025/1/6</a:t>
+              <a:t>2025/2/7</a:t>
             </a:fld>
             <a:endParaRPr kumimoji="1" lang="ja-JP" altLang="en-US"/>
           </a:p>
@@ -3199,7 +3199,7 @@
           <a:p>
             <a:fld id="{E9CC885B-4903-4D54-9A93-00025F12DED9}" type="datetimeFigureOut">
               <a:rPr kumimoji="1" lang="ja-JP" altLang="en-US" smtClean="0"/>
-              <a:t>2025/1/6</a:t>
+              <a:t>2025/2/7</a:t>
             </a:fld>
             <a:endParaRPr kumimoji="1" lang="ja-JP" altLang="en-US"/>
           </a:p>
@@ -4261,7 +4261,7 @@
             </a:r>
             <a:r>
               <a:rPr lang="ja-JP" altLang="en-US" sz="2400"/>
-              <a:t>取得すｆる</a:t>
+              <a:t>取得する</a:t>
             </a:r>
             <a:r>
               <a:rPr lang="ja-JP" altLang="en-US" sz="2400" dirty="0"/>

--- a/ゲーム科2年/00_前期/ゲーム開発Ⅰ/11_デバッグカメラ課題.pptx
+++ b/ゲーム科2年/00_前期/ゲーム開発Ⅰ/11_デバッグカメラ課題.pptx
@@ -8,7 +8,6 @@
     <p:sldId id="257" r:id="rId2"/>
     <p:sldId id="258" r:id="rId3"/>
     <p:sldId id="259" r:id="rId4"/>
-    <p:sldId id="260" r:id="rId5"/>
   </p:sldIdLst>
   <p:sldSz cx="12192000" cy="6858000"/>
   <p:notesSz cx="6858000" cy="9144000"/>
@@ -262,7 +261,7 @@
           <a:p>
             <a:fld id="{E9CC885B-4903-4D54-9A93-00025F12DED9}" type="datetimeFigureOut">
               <a:rPr kumimoji="1" lang="ja-JP" altLang="en-US" smtClean="0"/>
-              <a:t>2026/2/5</a:t>
+              <a:t>2026/2/9</a:t>
             </a:fld>
             <a:endParaRPr kumimoji="1" lang="ja-JP" altLang="en-US"/>
           </a:p>
@@ -492,7 +491,7 @@
           <a:p>
             <a:fld id="{E9CC885B-4903-4D54-9A93-00025F12DED9}" type="datetimeFigureOut">
               <a:rPr kumimoji="1" lang="ja-JP" altLang="en-US" smtClean="0"/>
-              <a:t>2026/2/5</a:t>
+              <a:t>2026/2/9</a:t>
             </a:fld>
             <a:endParaRPr kumimoji="1" lang="ja-JP" altLang="en-US"/>
           </a:p>
@@ -732,7 +731,7 @@
           <a:p>
             <a:fld id="{E9CC885B-4903-4D54-9A93-00025F12DED9}" type="datetimeFigureOut">
               <a:rPr kumimoji="1" lang="ja-JP" altLang="en-US" smtClean="0"/>
-              <a:t>2026/2/5</a:t>
+              <a:t>2026/2/9</a:t>
             </a:fld>
             <a:endParaRPr kumimoji="1" lang="ja-JP" altLang="en-US"/>
           </a:p>
@@ -962,7 +961,7 @@
           <a:p>
             <a:fld id="{E9CC885B-4903-4D54-9A93-00025F12DED9}" type="datetimeFigureOut">
               <a:rPr kumimoji="1" lang="ja-JP" altLang="en-US" smtClean="0"/>
-              <a:t>2026/2/5</a:t>
+              <a:t>2026/2/9</a:t>
             </a:fld>
             <a:endParaRPr kumimoji="1" lang="ja-JP" altLang="en-US"/>
           </a:p>
@@ -1237,7 +1236,7 @@
           <a:p>
             <a:fld id="{E9CC885B-4903-4D54-9A93-00025F12DED9}" type="datetimeFigureOut">
               <a:rPr kumimoji="1" lang="ja-JP" altLang="en-US" smtClean="0"/>
-              <a:t>2026/2/5</a:t>
+              <a:t>2026/2/9</a:t>
             </a:fld>
             <a:endParaRPr kumimoji="1" lang="ja-JP" altLang="en-US"/>
           </a:p>
@@ -1566,7 +1565,7 @@
           <a:p>
             <a:fld id="{E9CC885B-4903-4D54-9A93-00025F12DED9}" type="datetimeFigureOut">
               <a:rPr kumimoji="1" lang="ja-JP" altLang="en-US" smtClean="0"/>
-              <a:t>2026/2/5</a:t>
+              <a:t>2026/2/9</a:t>
             </a:fld>
             <a:endParaRPr kumimoji="1" lang="ja-JP" altLang="en-US"/>
           </a:p>
@@ -2042,7 +2041,7 @@
           <a:p>
             <a:fld id="{E9CC885B-4903-4D54-9A93-00025F12DED9}" type="datetimeFigureOut">
               <a:rPr kumimoji="1" lang="ja-JP" altLang="en-US" smtClean="0"/>
-              <a:t>2026/2/5</a:t>
+              <a:t>2026/2/9</a:t>
             </a:fld>
             <a:endParaRPr kumimoji="1" lang="ja-JP" altLang="en-US"/>
           </a:p>
@@ -2183,7 +2182,7 @@
           <a:p>
             <a:fld id="{E9CC885B-4903-4D54-9A93-00025F12DED9}" type="datetimeFigureOut">
               <a:rPr kumimoji="1" lang="ja-JP" altLang="en-US" smtClean="0"/>
-              <a:t>2026/2/5</a:t>
+              <a:t>2026/2/9</a:t>
             </a:fld>
             <a:endParaRPr kumimoji="1" lang="ja-JP" altLang="en-US"/>
           </a:p>
@@ -2296,7 +2295,7 @@
           <a:p>
             <a:fld id="{E9CC885B-4903-4D54-9A93-00025F12DED9}" type="datetimeFigureOut">
               <a:rPr kumimoji="1" lang="ja-JP" altLang="en-US" smtClean="0"/>
-              <a:t>2026/2/5</a:t>
+              <a:t>2026/2/9</a:t>
             </a:fld>
             <a:endParaRPr kumimoji="1" lang="ja-JP" altLang="en-US"/>
           </a:p>
@@ -2639,7 +2638,7 @@
           <a:p>
             <a:fld id="{E9CC885B-4903-4D54-9A93-00025F12DED9}" type="datetimeFigureOut">
               <a:rPr kumimoji="1" lang="ja-JP" altLang="en-US" smtClean="0"/>
-              <a:t>2026/2/5</a:t>
+              <a:t>2026/2/9</a:t>
             </a:fld>
             <a:endParaRPr kumimoji="1" lang="ja-JP" altLang="en-US"/>
           </a:p>
@@ -2927,7 +2926,7 @@
           <a:p>
             <a:fld id="{E9CC885B-4903-4D54-9A93-00025F12DED9}" type="datetimeFigureOut">
               <a:rPr kumimoji="1" lang="ja-JP" altLang="en-US" smtClean="0"/>
-              <a:t>2026/2/5</a:t>
+              <a:t>2026/2/9</a:t>
             </a:fld>
             <a:endParaRPr kumimoji="1" lang="ja-JP" altLang="en-US"/>
           </a:p>
@@ -3200,7 +3199,7 @@
           <a:p>
             <a:fld id="{E9CC885B-4903-4D54-9A93-00025F12DED9}" type="datetimeFigureOut">
               <a:rPr kumimoji="1" lang="ja-JP" altLang="en-US" smtClean="0"/>
-              <a:t>2026/2/5</a:t>
+              <a:t>2026/2/9</a:t>
             </a:fld>
             <a:endParaRPr kumimoji="1" lang="ja-JP" altLang="en-US"/>
           </a:p>
@@ -3893,15 +3892,7 @@
           <a:p>
             <a:r>
               <a:rPr lang="ja-JP" altLang="en-US" sz="2400" dirty="0"/>
-              <a:t>・</a:t>
-            </a:r>
-            <a:r>
-              <a:rPr lang="en-US" altLang="ja-JP" sz="2400" dirty="0"/>
-              <a:t>WASD</a:t>
-            </a:r>
-            <a:r>
-              <a:rPr lang="ja-JP" altLang="en-US" sz="2400" dirty="0"/>
-              <a:t>で上下左右移動</a:t>
+              <a:t>・カーソルキーで方向転換</a:t>
             </a:r>
             <a:endParaRPr lang="en-US" altLang="ja-JP" sz="2400" dirty="0"/>
           </a:p>
@@ -3923,7 +3914,7 @@
               <a:t>X</a:t>
             </a:r>
             <a:r>
-              <a:rPr lang="ja-JP" altLang="en-US" sz="2400"/>
+              <a:rPr lang="ja-JP" altLang="en-US" sz="2400" dirty="0"/>
               <a:t>キーで後退</a:t>
             </a:r>
             <a:endParaRPr lang="en-US" altLang="ja-JP" sz="2400" dirty="0"/>
@@ -4299,125 +4290,6 @@
     <p:extLst>
       <p:ext uri="{BB962C8B-B14F-4D97-AF65-F5344CB8AC3E}">
         <p14:creationId xmlns:p14="http://schemas.microsoft.com/office/powerpoint/2010/main" val="962950023"/>
-      </p:ext>
-    </p:extLst>
-  </p:cSld>
-  <p:clrMapOvr>
-    <a:masterClrMapping/>
-  </p:clrMapOvr>
-</p:sld>
-</file>
-
-<file path=ppt/slides/slide4.xml><?xml version="1.0" encoding="utf-8"?>
-<p:sld xmlns:a="http://schemas.openxmlformats.org/drawingml/2006/main" xmlns:r="http://schemas.openxmlformats.org/officeDocument/2006/relationships" xmlns:p="http://schemas.openxmlformats.org/presentationml/2006/main">
-  <p:cSld>
-    <p:spTree>
-      <p:nvGrpSpPr>
-        <p:cNvPr id="1" name=""/>
-        <p:cNvGrpSpPr/>
-        <p:nvPr/>
-      </p:nvGrpSpPr>
-      <p:grpSpPr>
-        <a:xfrm>
-          <a:off x="0" y="0"/>
-          <a:ext cx="0" cy="0"/>
-          <a:chOff x="0" y="0"/>
-          <a:chExt cx="0" cy="0"/>
-        </a:xfrm>
-      </p:grpSpPr>
-      <p:sp>
-        <p:nvSpPr>
-          <p:cNvPr id="4" name="テキスト ボックス 3">
-            <a:extLst>
-              <a:ext uri="{FF2B5EF4-FFF2-40B4-BE49-F238E27FC236}">
-                <a16:creationId xmlns:a16="http://schemas.microsoft.com/office/drawing/2014/main" id="{5A13BF46-B8C5-48AA-8308-C9ECFF431A18}"/>
-              </a:ext>
-            </a:extLst>
-          </p:cNvPr>
-          <p:cNvSpPr txBox="1"/>
-          <p:nvPr/>
-        </p:nvSpPr>
-        <p:spPr>
-          <a:xfrm>
-            <a:off x="567542" y="491954"/>
-            <a:ext cx="4815742" cy="584775"/>
-          </a:xfrm>
-          <a:prstGeom prst="rect">
-            <a:avLst/>
-          </a:prstGeom>
-          <a:noFill/>
-        </p:spPr>
-        <p:txBody>
-          <a:bodyPr wrap="none" rtlCol="0">
-            <a:spAutoFit/>
-          </a:bodyPr>
-          <a:lstStyle/>
-          <a:p>
-            <a:r>
-              <a:rPr lang="ja-JP" altLang="en-US" sz="3200" b="1" u="sng" dirty="0"/>
-              <a:t>デバッグカメラ課題 補足</a:t>
-            </a:r>
-            <a:endParaRPr kumimoji="1" lang="en-US" altLang="ja-JP" sz="3200" b="1" u="sng" dirty="0"/>
-          </a:p>
-        </p:txBody>
-      </p:sp>
-      <p:sp>
-        <p:nvSpPr>
-          <p:cNvPr id="6" name="テキスト ボックス 5">
-            <a:extLst>
-              <a:ext uri="{FF2B5EF4-FFF2-40B4-BE49-F238E27FC236}">
-                <a16:creationId xmlns:a16="http://schemas.microsoft.com/office/drawing/2014/main" id="{55830AD6-028B-4C4E-80BF-B70DFC1C3A46}"/>
-              </a:ext>
-            </a:extLst>
-          </p:cNvPr>
-          <p:cNvSpPr txBox="1"/>
-          <p:nvPr/>
-        </p:nvSpPr>
-        <p:spPr>
-          <a:xfrm>
-            <a:off x="567542" y="1216429"/>
-            <a:ext cx="8186857" cy="1569660"/>
-          </a:xfrm>
-          <a:prstGeom prst="rect">
-            <a:avLst/>
-          </a:prstGeom>
-          <a:noFill/>
-        </p:spPr>
-        <p:txBody>
-          <a:bodyPr wrap="none" rtlCol="0">
-            <a:spAutoFit/>
-          </a:bodyPr>
-          <a:lstStyle/>
-          <a:p>
-            <a:r>
-              <a:rPr lang="ja-JP" altLang="en-US" sz="2400" dirty="0"/>
-              <a:t>市販のゲームのようにカメラの回転は未実装で良いです。</a:t>
-            </a:r>
-            <a:endParaRPr lang="en-US" altLang="ja-JP" sz="2400" dirty="0"/>
-          </a:p>
-          <a:p>
-            <a:endParaRPr lang="en-US" altLang="ja-JP" sz="2400" dirty="0"/>
-          </a:p>
-          <a:p>
-            <a:r>
-              <a:rPr lang="ja-JP" altLang="en-US" sz="2400" dirty="0"/>
-              <a:t>カメラの回転には行列という数学の知識が必要です。</a:t>
-            </a:r>
-            <a:endParaRPr lang="en-US" altLang="ja-JP" sz="2400" dirty="0"/>
-          </a:p>
-          <a:p>
-            <a:r>
-              <a:rPr lang="ja-JP" altLang="en-US" sz="2400" dirty="0"/>
-              <a:t>行列を学習してから実装します。</a:t>
-            </a:r>
-            <a:endParaRPr lang="en-US" altLang="ja-JP" sz="2400" dirty="0"/>
-          </a:p>
-        </p:txBody>
-      </p:sp>
-    </p:spTree>
-    <p:extLst>
-      <p:ext uri="{BB962C8B-B14F-4D97-AF65-F5344CB8AC3E}">
-        <p14:creationId xmlns:p14="http://schemas.microsoft.com/office/powerpoint/2010/main" val="1663443040"/>
       </p:ext>
     </p:extLst>
   </p:cSld>
